--- a/docs/links-24/presentations/Familiar-Nine-for-colleagues.pptx
+++ b/docs/links-24/presentations/Familiar-Nine-for-colleagues.pptx
@@ -1132,7 +1132,7 @@
           <a:p>
             <a:r>
               <a:rPr lang="en-US" dirty="0"/>
-              <a:t>This is the whole pitch on one slide. Same 35-hour week as now. Never more than six days in a row. One full weekend off in every four weeks, against one in five today — though each person works about four more Saturdays a year. Eight of the sixteen shift times are ones people already work. And every closing shift is shorter: the weekday and Saturday closers by 30 minutes, the Sunday closer by 45.</a:t>
+              <a:t>This is the whole pitch on one slide. Same 35-hour week as now. Never more than six days in a row. Six full weekends off in every 24 weeks, against four in 20 today — though each person works about four more Saturdays a year. Eight of the sixteen shift times are ones people already work. And every closing shift is shorter: the weekday and Saturday closers by 30 minutes, the Sunday closer by 45.</a:t>
             </a:r>
             <a:endParaRPr lang="en-US" dirty="0"/>
           </a:p>
@@ -1748,7 +1748,7 @@
           <a:p>
             <a:r>
               <a:rPr lang="en-US" dirty="0"/>
-              <a:t>A full weekend is Saturday and the following Sunday both off. Today that is 4 weekends in a 20-week cycle — one in five; Familiar Nine gives 6 in 24 — one in four. Most weeks now keep the same shift time Monday to Friday, and all earlies or all lates, so you are not bouncing between earlies and lates inside a week. Rest days nearly always come in pairs now — 22 of the 24 rest-day breaks are two days or more, against 13 of 17 today — and there are no six-day weeks (today there is one).</a:t>
+              <a:t>A full weekend is Saturday and the following Sunday both off. Today that is 4 weekends in a 20-week cycle; Familiar Nine gives 6 in 24. They fall unevenly, not every fourth week — never more than seven weeks apart, the same longest wait as today. Most weeks now keep the same shift time Monday to Friday, and all earlies or all lates, so you are not bouncing between earlies and lates inside a week. Rest days nearly always come in pairs now — 22 of the 24 rest-day breaks are two days or more, against 13 of 17 today — and there are no six-day weeks (today there is one).</a:t>
             </a:r>
             <a:endParaRPr lang="en-US" dirty="0"/>
           </a:p>
@@ -6723,7 +6723,7 @@
                           <a:ea typeface="Inter" pitchFamily="34" charset="-122"/>
                           <a:cs typeface="Inter" pitchFamily="34" charset="-120"/>
                         </a:rPr>
-                        <a:t>4 in 20 (one in five)</a:t>
+                        <a:t>4 in 20</a:t>
                       </a:r>
                       <a:endParaRPr lang="en-US" sz="1200" dirty="0">
                         <a:latin typeface="Inter" charset="0"/>
@@ -6791,7 +6791,7 @@
                           <a:ea typeface="Inter" pitchFamily="34" charset="-122"/>
                           <a:cs typeface="Inter" pitchFamily="34" charset="-120"/>
                         </a:rPr>
-                        <a:t>6 in 24 (one in four)</a:t>
+                        <a:t>6 in 24</a:t>
                       </a:r>
                       <a:endParaRPr lang="en-US" sz="1200" dirty="0">
                         <a:latin typeface="Inter" charset="0"/>
@@ -8771,7 +8771,7 @@
                 <a:ea typeface="Inter" pitchFamily="34" charset="-122"/>
                 <a:cs typeface="Inter" pitchFamily="34" charset="-120"/>
               </a:rPr>
-              <a:t>one in four, not one in five</a:t>
+              <a:t>today 4 in 20</a:t>
             </a:r>
             <a:endParaRPr lang="en-US" sz="1200" dirty="0"/>
           </a:p>
@@ -12437,7 +12437,7 @@
                 <a:ea typeface="Inter" pitchFamily="34" charset="-122"/>
                 <a:cs typeface="Inter" pitchFamily="34" charset="-120"/>
               </a:rPr>
-              <a:t>Yes — about one extra late finish every two or three weeks</a:t>
+              <a:t>Yes — about 59 a year each, against 39 today</a:t>
             </a:r>
             <a:endParaRPr lang="en-US" sz="1500" dirty="0"/>
           </a:p>
@@ -15016,7 +15016,7 @@
                 <a:ea typeface="Inter" pitchFamily="34" charset="-122"/>
                 <a:cs typeface="Inter" pitchFamily="34" charset="-120"/>
               </a:rPr>
-              <a:t>A weekend off one week in four, never more than six days on, and more rest.</a:t>
+              <a:t>Six weekends off in 24 weeks, never more than six days on, and more rest.</a:t>
             </a:r>
             <a:endParaRPr lang="en-US" sz="1400" dirty="0"/>
           </a:p>
